--- a/docs/links-26/presentations/Closing-Time-for-managers.pptx
+++ b/docs/links-26/presentations/Closing-Time-for-managers.pptx
@@ -1458,7 +1458,7 @@
           <a:p>
             <a:r>
               <a:rPr lang="en-US" dirty="0"/>
-              <a:t>This is the case in one slide. Closing Time answers a later brief than the shortlist (26 October 2026): today’s link on 26 lines, keeping today’s shift times where it could, a 13:45 finish every weekday and a closer starting at 16:00. It meets every December staffing rule and two of the three flexible ones: the third asks for weekday closers at 15:45, and its brief moved them to 16:00, shorter still. The weekday and Saturday closers are 7h 55m, where today they are 8h 40m and 9h 10m, and the Sunday closer is 45 minutes shorter. Eight of its thirteen shift times are worked today. Nobody works more than five days in a row on the fixed rota, its seven full weekends off in 26 weeks are never more than five weeks apart, every working week is all earlies or all lates, and 17 of the 21 keep one shift time Monday to Friday, where today it is seven weeks in 16. No working week is over 41h 30m or under 27h 00m, and the shortest rest is 14h 35m. The honest costs: to keep a 13:45 every weekday as well as the 16:00 closer, three weekday 13:30 lates run to 22:30, so finishes at 22:00 or later go from about 78 to 104 a year each; finishes at 23:00 or later go from 39 to 42, the smallest rise the December staffing allows; and five shift times are new.</a:t>
+              <a:t>This is the case in one slide. Closing Time answers a later brief than the other three shortlisted links (26 October 2026): today’s link on 26 lines, keeping today’s shift times where it could, a 13:45 finish every weekday and a closer starting at 16:00. It meets every December staffing rule and two of the three flexible ones: the third asks for weekday closers at 15:45, and its brief moved them to 16:00, shorter still. The weekday and Saturday closers are 7h 55m, where today they are 8h 40m and 9h 10m, and the Sunday closer is 45 minutes shorter. Eight of its thirteen shift times are worked today. Nobody works more than five days in a row on the fixed rota, its seven full weekends off in 26 weeks are never more than five weeks apart, every working week is all earlies or all lates, and 17 of the 21 keep one shift time Monday to Friday, where today it is seven weeks in 16. No working week is over 41h 30m or under 27h 00m, and the shortest rest is 14h 35m. The honest costs: to keep a 13:45 every weekday as well as the 16:00 closer, three weekday 13:30 lates run to 22:30, so finishes at 22:00 or later go from about 78 to 104 a year each; finishes at 23:00 or later go from 39 to 42, the smallest rise the December staffing allows; and five shift times are new.</a:t>
             </a:r>
             <a:endParaRPr lang="en-US" dirty="0"/>
           </a:p>
@@ -6353,7 +6353,7 @@
                 <a:ea typeface="Inter" pitchFamily="34" charset="-122"/>
                 <a:cs typeface="Inter" pitchFamily="34" charset="-120"/>
               </a:rPr>
-              <a:t>What it shares with the shortlist, what it adds, and what it costs</a:t>
+              <a:t>What all four shortlisted links give, what this one adds, and what it costs</a:t>
             </a:r>
             <a:endParaRPr lang="en-US" sz="1500" dirty="0"/>
           </a:p>
@@ -6456,7 +6456,7 @@
                 <a:ea typeface="Inter" pitchFamily="34" charset="-122"/>
                 <a:cs typeface="Inter" pitchFamily="34" charset="-120"/>
               </a:rPr>
-              <a:t>Like the shortlist: all 9 December rules and no avoidable fatigue warning</a:t>
+              <a:t>All four shortlisted: all 9 December rules and no avoidable fatigue warning</a:t>
             </a:r>
             <a:endParaRPr lang="en-US" sz="1500" dirty="0"/>
           </a:p>
@@ -6559,7 +6559,7 @@
                 <a:ea typeface="Inter" pitchFamily="34" charset="-122"/>
                 <a:cs typeface="Inter" pitchFamily="34" charset="-120"/>
               </a:rPr>
-              <a:t>Like the shortlist: about 14 full weekends off a year (today 10), at most 5 apart</a:t>
+              <a:t>All four shortlisted: about 14 full weekends off a year (today 10), at most 5 apart</a:t>
             </a:r>
             <a:endParaRPr lang="en-US" sz="1500" dirty="0"/>
           </a:p>
@@ -6662,7 +6662,7 @@
                 <a:ea typeface="Inter" pitchFamily="34" charset="-122"/>
                 <a:cs typeface="Inter" pitchFamily="34" charset="-120"/>
               </a:rPr>
-              <a:t>Like the shortlist: no shift over 9 hours, and every closing shift shorter</a:t>
+              <a:t>All four shortlisted: no shift over 9 hours, and every closing shift shorter</a:t>
             </a:r>
             <a:endParaRPr lang="en-US" sz="1500" dirty="0"/>
           </a:p>
